--- a/set/2026-06-28 El Camino Baptist Church-CH.pptx
+++ b/set/2026-06-28 El Camino Baptist Church-CH.pptx
@@ -295,7 +295,7 @@
           <a:p>
             <a:fld id="{E759A0DE-F190-5444-87AC-4719D5F20D15}" type="datetimeFigureOut">
               <a:rPr lang="en-US" smtClean="0"/>
-              <a:t>6/27/26</a:t>
+              <a:t>6/28/26</a:t>
             </a:fld>
             <a:endParaRPr lang="en-US"/>
           </a:p>
@@ -493,7 +493,7 @@
           <a:p>
             <a:fld id="{E759A0DE-F190-5444-87AC-4719D5F20D15}" type="datetimeFigureOut">
               <a:rPr lang="en-US" smtClean="0"/>
-              <a:t>6/27/26</a:t>
+              <a:t>6/28/26</a:t>
             </a:fld>
             <a:endParaRPr lang="en-US"/>
           </a:p>
@@ -701,7 +701,7 @@
           <a:p>
             <a:fld id="{E759A0DE-F190-5444-87AC-4719D5F20D15}" type="datetimeFigureOut">
               <a:rPr lang="en-US" smtClean="0"/>
-              <a:t>6/27/26</a:t>
+              <a:t>6/28/26</a:t>
             </a:fld>
             <a:endParaRPr lang="en-US"/>
           </a:p>
@@ -899,7 +899,7 @@
           <a:p>
             <a:fld id="{E759A0DE-F190-5444-87AC-4719D5F20D15}" type="datetimeFigureOut">
               <a:rPr lang="en-US" smtClean="0"/>
-              <a:t>6/27/26</a:t>
+              <a:t>6/28/26</a:t>
             </a:fld>
             <a:endParaRPr lang="en-US"/>
           </a:p>
@@ -1174,7 +1174,7 @@
           <a:p>
             <a:fld id="{E759A0DE-F190-5444-87AC-4719D5F20D15}" type="datetimeFigureOut">
               <a:rPr lang="en-US" smtClean="0"/>
-              <a:t>6/27/26</a:t>
+              <a:t>6/28/26</a:t>
             </a:fld>
             <a:endParaRPr lang="en-US"/>
           </a:p>
@@ -1439,7 +1439,7 @@
           <a:p>
             <a:fld id="{E759A0DE-F190-5444-87AC-4719D5F20D15}" type="datetimeFigureOut">
               <a:rPr lang="en-US" smtClean="0"/>
-              <a:t>6/27/26</a:t>
+              <a:t>6/28/26</a:t>
             </a:fld>
             <a:endParaRPr lang="en-US"/>
           </a:p>
@@ -1851,7 +1851,7 @@
           <a:p>
             <a:fld id="{E759A0DE-F190-5444-87AC-4719D5F20D15}" type="datetimeFigureOut">
               <a:rPr lang="en-US" smtClean="0"/>
-              <a:t>6/27/26</a:t>
+              <a:t>6/28/26</a:t>
             </a:fld>
             <a:endParaRPr lang="en-US"/>
           </a:p>
@@ -1992,7 +1992,7 @@
           <a:p>
             <a:fld id="{E759A0DE-F190-5444-87AC-4719D5F20D15}" type="datetimeFigureOut">
               <a:rPr lang="en-US" smtClean="0"/>
-              <a:t>6/27/26</a:t>
+              <a:t>6/28/26</a:t>
             </a:fld>
             <a:endParaRPr lang="en-US"/>
           </a:p>
@@ -2105,7 +2105,7 @@
           <a:p>
             <a:fld id="{E759A0DE-F190-5444-87AC-4719D5F20D15}" type="datetimeFigureOut">
               <a:rPr lang="en-US" smtClean="0"/>
-              <a:t>6/27/26</a:t>
+              <a:t>6/28/26</a:t>
             </a:fld>
             <a:endParaRPr lang="en-US"/>
           </a:p>
@@ -2416,7 +2416,7 @@
           <a:p>
             <a:fld id="{E759A0DE-F190-5444-87AC-4719D5F20D15}" type="datetimeFigureOut">
               <a:rPr lang="en-US" smtClean="0"/>
-              <a:t>6/27/26</a:t>
+              <a:t>6/28/26</a:t>
             </a:fld>
             <a:endParaRPr lang="en-US"/>
           </a:p>
@@ -2704,7 +2704,7 @@
           <a:p>
             <a:fld id="{E759A0DE-F190-5444-87AC-4719D5F20D15}" type="datetimeFigureOut">
               <a:rPr lang="en-US" smtClean="0"/>
-              <a:t>6/27/26</a:t>
+              <a:t>6/28/26</a:t>
             </a:fld>
             <a:endParaRPr lang="en-US"/>
           </a:p>
@@ -2945,7 +2945,7 @@
           <a:p>
             <a:fld id="{E759A0DE-F190-5444-87AC-4719D5F20D15}" type="datetimeFigureOut">
               <a:rPr lang="en-US" smtClean="0"/>
-              <a:t>6/27/26</a:t>
+              <a:t>6/28/26</a:t>
             </a:fld>
             <a:endParaRPr lang="en-US"/>
           </a:p>
@@ -4529,6 +4529,36 @@
             <a:noAutofit/>
           </a:bodyPr>
           <a:lstStyle/>
+          <a:p>
+            <a:pPr algn="l"/>
+            <a:r>
+              <a:rPr lang="en-US" sz="3600">
+                <a:solidFill>
+                  <a:srgbClr val="FFFF00"/>
+                </a:solidFill>
+                <a:latin typeface="Avenir Medium" panose="02000503020000020003" pitchFamily="2" charset="0"/>
+                <a:ea typeface="Bodoni Ornaments" pitchFamily="2" charset="0"/>
+              </a:rPr>
+              <a:t>CAPO 2</a:t>
+            </a:r>
+            <a:r>
+              <a:rPr lang="en-US" sz="3600" baseline="30000">
+                <a:solidFill>
+                  <a:srgbClr val="FFFF00"/>
+                </a:solidFill>
+                <a:latin typeface="Avenir Medium" panose="02000503020000020003" pitchFamily="2" charset="0"/>
+                <a:ea typeface="Bodoni Ornaments" pitchFamily="2" charset="0"/>
+              </a:rPr>
+              <a:t>nd</a:t>
+            </a:r>
+            <a:endParaRPr lang="en-US" sz="3600">
+              <a:solidFill>
+                <a:srgbClr val="FFFF00"/>
+              </a:solidFill>
+              <a:latin typeface="Avenir Medium" panose="02000503020000020003" pitchFamily="2" charset="0"/>
+              <a:ea typeface="Bodoni Ornaments" pitchFamily="2" charset="0"/>
+            </a:endParaRPr>
+          </a:p>
           <a:p>
             <a:pPr algn="l"/>
             <a:endParaRPr lang="en-US" sz="3600" dirty="0">
